--- a/it/slides/15-Architettura_dei_Calcolatori-Memoria-Lab.pptx
+++ b/it/slides/15-Architettura_dei_Calcolatori-Memoria-Lab.pptx
@@ -123,33 +123,33 @@
   <p:extLst>
     <p:ext uri="{521415D9-36F7-43E2-AB2F-B90AF26B5E84}">
       <p14:sectionLst xmlns:p14="http://schemas.microsoft.com/office/powerpoint/2010/main">
-        <p14:section name="Apertura" id="{6c9a2ec6-268f-1db9-723b-55590a04a055}">
+        <p14:section name="Apertura" id="{691a169a-8e68-5a3a-ac6d-99bdb94c8ef6}">
           <p14:sldIdLst>
             <p14:sldId id="256"/>
             <p14:sldId id="257"/>
           </p14:sldIdLst>
         </p14:section>
-        <p14:section name="Riscaldamento sulla macchina" id="{27afa10c-2b85-6a0e-73bc-f1d0fa079012}">
+        <p14:section name="Riscaldamento sulla macchina" id="{662cc434-f2a5-80b8-c32f-06d5b943ddb1}">
           <p14:sldIdLst>
             <p14:sldId id="258"/>
           </p14:sldIdLst>
         </p14:section>
-        <p14:section name="La memoria centrale" id="{7fa8f15a-505d-83c1-d997-ac35ff736034}">
+        <p14:section name="La memoria centrale" id="{19882dc0-990c-1cde-ba86-e99b78007234}">
           <p14:sldIdLst>
             <p14:sldId id="259"/>
           </p14:sldIdLst>
         </p14:section>
-        <p14:section name="Processore e memoria" id="{2e371f99-8061-68ea-910f-ab3757fbbe26}">
+        <p14:section name="Processore e memoria" id="{eb07fedf-220c-0de3-0f3e-7abc82ce1893}">
           <p14:sldIdLst>
             <p14:sldId id="260"/>
           </p14:sldIdLst>
         </p14:section>
-        <p14:section name="Memoria e ingresso/uscita" id="{5f602651-794b-e990-8475-3d20b83d32ac}">
+        <p14:section name="Memoria e ingresso/uscita" id="{03a98a11-9073-1830-8ea8-33a4cf395e7b}">
           <p14:sldIdLst>
             <p14:sldId id="261"/>
           </p14:sldIdLst>
         </p14:section>
-        <p14:section name="Il programma completo" id="{cc77fd2c-34d5-5557-39c3-e9f2c5c25f7d}">
+        <p14:section name="Il programma completo" id="{e5d1b488-3f98-4236-d242-e793cb280e7f}">
           <p14:sldIdLst>
             <p14:sldId id="262"/>
             <p14:sldId id="263"/>
@@ -158,7 +158,7 @@
             <p14:sldId id="266"/>
           </p14:sldIdLst>
         </p14:section>
-        <p14:section name="Eseguire e provare" id="{9772487d-4e21-47db-6cf0-1b2fe9682cc6}">
+        <p14:section name="Eseguire e provare" id="{af680e2d-642b-d560-8e25-77047a984ba1}">
           <p14:sldIdLst>
             <p14:sldId id="267"/>
             <p14:sldId id="268"/>
@@ -167,7 +167,7 @@
             <p14:sldId id="271"/>
           </p14:sldIdLst>
         </p14:section>
-        <p14:section name="Esercizi" id="{9c6f4de7-8d90-de72-4212-39999ad3dd7d}">
+        <p14:section name="Esercizi" id="{21c5df77-4e55-2022-96ca-b715f228ae51}">
           <p14:sldIdLst>
             <p14:sldId id="272"/>
           </p14:sldIdLst>

--- a/it/slides/15-Architettura_dei_Calcolatori-Memoria-Lab.pptx
+++ b/it/slides/15-Architettura_dei_Calcolatori-Memoria-Lab.pptx
@@ -123,33 +123,33 @@
   <p:extLst>
     <p:ext uri="{521415D9-36F7-43E2-AB2F-B90AF26B5E84}">
       <p14:sectionLst xmlns:p14="http://schemas.microsoft.com/office/powerpoint/2010/main">
-        <p14:section name="Apertura" id="{691a169a-8e68-5a3a-ac6d-99bdb94c8ef6}">
+        <p14:section name="Apertura" id="{0cd7963e-d896-782c-14dd-2e5101ca4cf7}">
           <p14:sldIdLst>
             <p14:sldId id="256"/>
             <p14:sldId id="257"/>
           </p14:sldIdLst>
         </p14:section>
-        <p14:section name="Riscaldamento sulla macchina" id="{662cc434-f2a5-80b8-c32f-06d5b943ddb1}">
+        <p14:section name="Riscaldamento sulla macchina" id="{eaa1ef9b-f38c-7194-d1ee-3fcb84ee708d}">
           <p14:sldIdLst>
             <p14:sldId id="258"/>
           </p14:sldIdLst>
         </p14:section>
-        <p14:section name="La memoria centrale" id="{19882dc0-990c-1cde-ba86-e99b78007234}">
+        <p14:section name="La memoria centrale" id="{9004a89a-09cf-b6bb-b5b1-28fb347db07e}">
           <p14:sldIdLst>
             <p14:sldId id="259"/>
           </p14:sldIdLst>
         </p14:section>
-        <p14:section name="Processore e memoria" id="{eb07fedf-220c-0de3-0f3e-7abc82ce1893}">
+        <p14:section name="Processore e memoria" id="{3f5408ec-dd8a-271d-8f1d-9e3e6369a872}">
           <p14:sldIdLst>
             <p14:sldId id="260"/>
           </p14:sldIdLst>
         </p14:section>
-        <p14:section name="Memoria e ingresso/uscita" id="{03a98a11-9073-1830-8ea8-33a4cf395e7b}">
+        <p14:section name="Memoria e ingresso/uscita" id="{2b608bb9-b808-57f2-5562-c0b47e4e3c8c}">
           <p14:sldIdLst>
             <p14:sldId id="261"/>
           </p14:sldIdLst>
         </p14:section>
-        <p14:section name="Il programma completo" id="{e5d1b488-3f98-4236-d242-e793cb280e7f}">
+        <p14:section name="Il programma completo" id="{cc7385ba-746c-cab7-1da8-6d014dc543c5}">
           <p14:sldIdLst>
             <p14:sldId id="262"/>
             <p14:sldId id="263"/>
@@ -158,7 +158,7 @@
             <p14:sldId id="266"/>
           </p14:sldIdLst>
         </p14:section>
-        <p14:section name="Eseguire e provare" id="{af680e2d-642b-d560-8e25-77047a984ba1}">
+        <p14:section name="Eseguire e provare" id="{44b73688-ff9d-1431-0d2b-ea8242fa8b1b}">
           <p14:sldIdLst>
             <p14:sldId id="267"/>
             <p14:sldId id="268"/>
@@ -167,7 +167,7 @@
             <p14:sldId id="271"/>
           </p14:sldIdLst>
         </p14:section>
-        <p14:section name="Esercizi" id="{21c5df77-4e55-2022-96ca-b715f228ae51}">
+        <p14:section name="Esercizi" id="{8e16020b-0fc0-fe81-189f-c0ce1960ac11}">
           <p14:sldIdLst>
             <p14:sldId id="272"/>
           </p14:sldIdLst>
@@ -578,7 +578,9 @@
               <a:rPr lang="en-US" dirty="0"/>
               <a:t>Questa è la presentazione del codice della Lezione 15. Mentre la presentazione della lezione sviluppa i concetti, questa raccoglie tutto ciò che si scrive e si esegue: ogni listato con il suo commento, il programma completo della lezione, il risultato che deve produrre, e la procedura per provarlo su ciascuno dei tre host. Le due presentazioni vanno lette insieme: i concetti spiegano il codice, e il codice dà ai concetti una conseguenza osservabile.
 Stato di apprendimento: DA COMPRENDERE OGGI, alla fine di questa lezione lo spiegate, lo seguite passo passo e lo applicate da soli; DA UTILIZZARE OGGI, oggi seguite e usate la ricetta; come funziona dentro si spiega più avanti, o non fa parte del corso; DA COMPRENDERE PIÙ AVANTI, riconoscete il nome e lo scopo; lo spiega una lezione successiva. Una slide senza etichetta è contesto: una storia, un esempio, una domanda, un esercizio.
-Stato di apprendimento di questa lezione. DA COMPRENDERE OGGI: memorie e indirizzi; l'ordine little-endian; processore e memoria; l'I/O mappato in memoria. DA UTILIZZARE OGGI: il programma completo, gli strumenti di PRG32 (si usa, non si studia, in questo corso). DA COMPRENDERE PIÙ AVANTI: niente. Una slide senza etichetta è contesto: una storia, un esempio, una domanda, un esercizio.</a:t>
+Stato di apprendimento di questa lezione. DA COMPRENDERE OGGI: memorie e indirizzi; l'ordine little-endian; processore e memoria; l'I/O mappato in memoria. DA UTILIZZARE OGGI: il programma completo, gli strumenti di PRG32 (si usa, non si studia, in questo corso). DA COMPRENDERE PIÙ AVANTI: niente. Una slide senza etichetta è contesto: una storia, un esempio, una domanda, un esercizio.
+Percorso. I risultati di oggi: (1) calcolare la capacità di una memoria dalle sue linee di indirizzo e di dato; (2) descrivere l'interfaccia tra processore e memoria durante un caricamento; (3) spiegare l'ingresso/uscita mappato in memoria. Si appoggia su: l'ordine little-endian (Lezione 04). Prossimo passo: Lezione 16, La memoria permanente.
+Ponte. Dalla Lezione 02, lw t1, 0(t0) legge una parola a un indirizzo calcolato da t0. Oggi quell'indirizzo è quello messo sul bus degli indirizzi, registro più costante. La Lezione 19 lo chiama base più spiazzamento e lo confronta con gli altri modi di indirizzamento. Richiamo: In lw t1, 8(t0), quale indirizzo va sul bus degli indirizzi?</a:t>
             </a:r>
             <a:endParaRPr lang="en-US" dirty="0"/>
           </a:p>
